--- a/assets/pptx/catalog-180.pptx
+++ b/assets/pptx/catalog-180.pptx
@@ -3267,7 +3267,7 @@
                 <a:ea typeface="Ebrima"/>
                 <a:cs typeface="Ebrima"/>
               </a:rPr>
-              <a:t>አዳሬ በቸርነትህ ነው ኦሆሆ (4x)</a:t>
+              <a:t>አዳሬ በቸርነትህ ነው ኦሆሆ 4x</a:t>
             </a:r>
           </a:p>
         </p:txBody>
@@ -3352,7 +3352,7 @@
                 <a:ea typeface="Ebrima"/>
                 <a:cs typeface="Ebrima"/>
               </a:rPr>
-              <a:t>ሁሉ የሚያምረው በአንተ ሆኖ ሳይ (2x)</a:t>
+              <a:t>ሁሉ የሚያምረው በአንተ ሆኖ ሳይ 2x</a:t>
             </a:r>
           </a:p>
           <a:p>
@@ -3388,7 +3388,7 @@
                 <a:ea typeface="Ebrima"/>
                 <a:cs typeface="Ebrima"/>
               </a:rPr>
-              <a:t>ሀሳቤን ወዲያ ጥያለሁ አስቤ ምን እጨምራለሁ (2x)</a:t>
+              <a:t>ሀሳቤን ወዲያ ጥያለሁ አስቤ ምን እጨምራለሁ 2x</a:t>
             </a:r>
           </a:p>
         </p:txBody>
@@ -3957,7 +3957,7 @@
                 <a:ea typeface="Ebrima"/>
                 <a:cs typeface="Ebrima"/>
               </a:rPr>
-              <a:t>የአንተ ጥበቃ ነው ከክፉ የሚያስጥለው (2x)</a:t>
+              <a:t>የአንተ ጥበቃ ነው ከክፉ የሚያስጥለው 2x</a:t>
             </a:r>
           </a:p>
         </p:txBody>
@@ -4042,7 +4042,7 @@
                 <a:ea typeface="Ebrima"/>
                 <a:cs typeface="Ebrima"/>
               </a:rPr>
-              <a:t>አዳሬ በቸርነትህ ነው (2x)</a:t>
+              <a:t>አዳሬ በቸርነትህ ነው 2x</a:t>
             </a:r>
           </a:p>
         </p:txBody>
@@ -4127,7 +4127,7 @@
                 <a:ea typeface="Ebrima"/>
                 <a:cs typeface="Ebrima"/>
               </a:rPr>
-              <a:t>ዛሬም ነገም አንተ አስተማማኝ (2x)</a:t>
+              <a:t>ዛሬም ነገም አንተ አስተማማኝ 2x</a:t>
             </a:r>
           </a:p>
         </p:txBody>
